--- a/output/02-ai-daily-work/02-10-planning-and-productivity-with-ai.pptx
+++ b/output/02-ai-daily-work/02-10-planning-and-productivity-with-ai.pptx
@@ -12934,7 +12934,7 @@
                 </a:solidFill>
                 <a:latin typeface="Segoe UI"/>
               </a:rPr>
-              <a:t>Almost everyone is around fifty per cent optimistic, consistently.</a:t>
+              <a:t>People are consistently optimistic about their own estimates. Build in a buffer.</a:t>
             </a:r>
           </a:p>
         </p:txBody>
@@ -34170,7 +34170,7 @@
                 </a:solidFill>
                 <a:latin typeface="Segoe UI"/>
               </a:rPr>
-              <a:t>Three days is roughly how far ahead you can predict in most operational jobs. Re-planning on Wednesday takes five minutes and keeps the plan real.</a:t>
+              <a:t>Three days is short enough that today's information still holds, and long enough to sequence real work. Re-planning on Wednesday takes five minutes and keeps the plan matched to what has actually changed.</a:t>
             </a:r>
           </a:p>
         </p:txBody>
@@ -50236,7 +50236,7 @@
                 </a:solidFill>
                 <a:latin typeface="Segoe UI"/>
               </a:rPr>
-              <a:t>Because most people underestimate by roughly half</a:t>
+              <a:t>Because people are consistently optimistic about their own time estimates</a:t>
             </a:r>
           </a:p>
         </p:txBody>
@@ -50997,7 +50997,7 @@
                 </a:solidFill>
                 <a:latin typeface="Segoe UI"/>
               </a:rPr>
-              <a:t>Almost everyone is about half out.</a:t>
+              <a:t>People are consistently optimistic about their own estimates.</a:t>
             </a:r>
           </a:p>
         </p:txBody>
@@ -51725,7 +51725,7 @@
                 </a:solidFill>
                 <a:latin typeface="Segoe UI Semibold"/>
               </a:rPr>
-              <a:t>YOU CHOSE  B.  Because most people underestimate by roughly half</a:t>
+              <a:t>YOU CHOSE  B.  Because people are consistently optimistic about their own time estima</a:t>
             </a:r>
           </a:p>
         </p:txBody>
@@ -51770,7 +51770,7 @@
                 </a:solidFill>
                 <a:latin typeface="Segoe UI"/>
               </a:rPr>
-              <a:t>It is one of the most reliable patterns in how people plan work. Applying the correction gives you a day with three or four real tasks instead of nine imaginary ones.</a:t>
+              <a:t>It is a well-documented pattern in how people plan their own work, not a personal failing. Building in a buffer corrects for it and gives you a day with a realistic number of tasks instead of an optimistic one.</a:t>
             </a:r>
           </a:p>
         </p:txBody>
@@ -51904,7 +51904,7 @@
                 </a:solidFill>
                 <a:latin typeface="Segoe UI"/>
               </a:rPr>
-              <a:t>Almost everyone is about half out.</a:t>
+              <a:t>People are consistently optimistic about their own estimates.</a:t>
             </a:r>
           </a:p>
         </p:txBody>
@@ -52811,7 +52811,7 @@
                 </a:solidFill>
                 <a:latin typeface="Segoe UI"/>
               </a:rPr>
-              <a:t>Almost everyone is about half out.</a:t>
+              <a:t>People are consistently optimistic about their own estimates.</a:t>
             </a:r>
           </a:p>
         </p:txBody>
@@ -53718,7 +53718,7 @@
                 </a:solidFill>
                 <a:latin typeface="Segoe UI"/>
               </a:rPr>
-              <a:t>Almost everyone is about half out.</a:t>
+              <a:t>People are consistently optimistic about their own estimates.</a:t>
             </a:r>
           </a:p>
         </p:txBody>
@@ -55311,7 +55311,7 @@
                 </a:solidFill>
                 <a:latin typeface="Segoe UI Semibold"/>
               </a:rPr>
-              <a:t>Halve your estimates</a:t>
+              <a:t>Build in a buffer</a:t>
             </a:r>
           </a:p>
         </p:txBody>
@@ -55356,7 +55356,7 @@
                 </a:solidFill>
                 <a:latin typeface="Segoe UI"/>
               </a:rPr>
-              <a:t>Almost everyone is about fifty per cent optimistic, consistently.</a:t>
+              <a:t>People are consistently optimistic about their own estimates — a buffer corrects for it.</a:t>
             </a:r>
           </a:p>
         </p:txBody>
